--- a/.lessons/21 Fundamental CRUD/5 Creating Form (Part - 1)/1.pptx
+++ b/.lessons/21 Fundamental CRUD/5 Creating Form (Part - 1)/1.pptx
@@ -8,7 +8,10 @@
     <p:sldId id="401" r:id="rId2"/>
     <p:sldId id="402" r:id="rId3"/>
     <p:sldId id="403" r:id="rId4"/>
-    <p:sldId id="400" r:id="rId5"/>
+    <p:sldId id="404" r:id="rId5"/>
+    <p:sldId id="405" r:id="rId6"/>
+    <p:sldId id="406" r:id="rId7"/>
+    <p:sldId id="400" r:id="rId8"/>
   </p:sldIdLst>
   <p:sldSz cx="12192000" cy="6858000"/>
   <p:notesSz cx="6858000" cy="9144000"/>
@@ -262,7 +265,7 @@
           <a:p>
             <a:fld id="{3E102D2E-813C-461C-9963-687A650C48C0}" type="datetimeFigureOut">
               <a:rPr lang="en-US" smtClean="0"/>
-              <a:t>4/26/2025</a:t>
+              <a:t>5/16/2025</a:t>
             </a:fld>
             <a:endParaRPr lang="en-US"/>
           </a:p>
@@ -460,7 +463,7 @@
           <a:p>
             <a:fld id="{3E102D2E-813C-461C-9963-687A650C48C0}" type="datetimeFigureOut">
               <a:rPr lang="en-US" smtClean="0"/>
-              <a:t>4/26/2025</a:t>
+              <a:t>5/16/2025</a:t>
             </a:fld>
             <a:endParaRPr lang="en-US"/>
           </a:p>
@@ -668,7 +671,7 @@
           <a:p>
             <a:fld id="{3E102D2E-813C-461C-9963-687A650C48C0}" type="datetimeFigureOut">
               <a:rPr lang="en-US" smtClean="0"/>
-              <a:t>4/26/2025</a:t>
+              <a:t>5/16/2025</a:t>
             </a:fld>
             <a:endParaRPr lang="en-US"/>
           </a:p>
@@ -866,7 +869,7 @@
           <a:p>
             <a:fld id="{3E102D2E-813C-461C-9963-687A650C48C0}" type="datetimeFigureOut">
               <a:rPr lang="en-US" smtClean="0"/>
-              <a:t>4/26/2025</a:t>
+              <a:t>5/16/2025</a:t>
             </a:fld>
             <a:endParaRPr lang="en-US"/>
           </a:p>
@@ -1141,7 +1144,7 @@
           <a:p>
             <a:fld id="{3E102D2E-813C-461C-9963-687A650C48C0}" type="datetimeFigureOut">
               <a:rPr lang="en-US" smtClean="0"/>
-              <a:t>4/26/2025</a:t>
+              <a:t>5/16/2025</a:t>
             </a:fld>
             <a:endParaRPr lang="en-US"/>
           </a:p>
@@ -1406,7 +1409,7 @@
           <a:p>
             <a:fld id="{3E102D2E-813C-461C-9963-687A650C48C0}" type="datetimeFigureOut">
               <a:rPr lang="en-US" smtClean="0"/>
-              <a:t>4/26/2025</a:t>
+              <a:t>5/16/2025</a:t>
             </a:fld>
             <a:endParaRPr lang="en-US"/>
           </a:p>
@@ -1818,7 +1821,7 @@
           <a:p>
             <a:fld id="{3E102D2E-813C-461C-9963-687A650C48C0}" type="datetimeFigureOut">
               <a:rPr lang="en-US" smtClean="0"/>
-              <a:t>4/26/2025</a:t>
+              <a:t>5/16/2025</a:t>
             </a:fld>
             <a:endParaRPr lang="en-US"/>
           </a:p>
@@ -1959,7 +1962,7 @@
           <a:p>
             <a:fld id="{3E102D2E-813C-461C-9963-687A650C48C0}" type="datetimeFigureOut">
               <a:rPr lang="en-US" smtClean="0"/>
-              <a:t>4/26/2025</a:t>
+              <a:t>5/16/2025</a:t>
             </a:fld>
             <a:endParaRPr lang="en-US"/>
           </a:p>
@@ -2072,7 +2075,7 @@
           <a:p>
             <a:fld id="{3E102D2E-813C-461C-9963-687A650C48C0}" type="datetimeFigureOut">
               <a:rPr lang="en-US" smtClean="0"/>
-              <a:t>4/26/2025</a:t>
+              <a:t>5/16/2025</a:t>
             </a:fld>
             <a:endParaRPr lang="en-US"/>
           </a:p>
@@ -2383,7 +2386,7 @@
           <a:p>
             <a:fld id="{3E102D2E-813C-461C-9963-687A650C48C0}" type="datetimeFigureOut">
               <a:rPr lang="en-US" smtClean="0"/>
-              <a:t>4/26/2025</a:t>
+              <a:t>5/16/2025</a:t>
             </a:fld>
             <a:endParaRPr lang="en-US"/>
           </a:p>
@@ -2671,7 +2674,7 @@
           <a:p>
             <a:fld id="{3E102D2E-813C-461C-9963-687A650C48C0}" type="datetimeFigureOut">
               <a:rPr lang="en-US" smtClean="0"/>
-              <a:t>4/26/2025</a:t>
+              <a:t>5/16/2025</a:t>
             </a:fld>
             <a:endParaRPr lang="en-US"/>
           </a:p>
@@ -2912,7 +2915,7 @@
           <a:p>
             <a:fld id="{3E102D2E-813C-461C-9963-687A650C48C0}" type="datetimeFigureOut">
               <a:rPr lang="en-US" smtClean="0"/>
-              <a:t>4/26/2025</a:t>
+              <a:t>5/16/2025</a:t>
             </a:fld>
             <a:endParaRPr lang="en-US"/>
           </a:p>
@@ -3370,21 +3373,116 @@
               <a:buNone/>
             </a:pPr>
             <a:r>
-              <a:rPr kumimoji="0" lang="en-US" altLang="en-US" sz="1300" b="0" i="0" u="none" strike="noStrike" cap="none" normalizeH="0" baseline="0">
-                <a:ln>
-                  <a:noFill/>
-                </a:ln>
-                <a:solidFill>
-                  <a:schemeClr val="tx1"/>
-                </a:solidFill>
-                <a:effectLst/>
+              <a:rPr lang="en-US" altLang="en-US" sz="1300">
                 <a:latin typeface="Arial" panose="020B0604020202020204" pitchFamily="34" charset="0"/>
               </a:rPr>
-              <a:t>.</a:t>
-            </a:r>
-          </a:p>
-        </p:txBody>
-      </p:sp>
+              <a:t>Indi </a:t>
+            </a:r>
+            <a:r>
+              <a:rPr lang="en-US" altLang="en-US" sz="1300" b="1">
+                <a:latin typeface="Arial" panose="020B0604020202020204" pitchFamily="34" charset="0"/>
+              </a:rPr>
+              <a:t>MANUL</a:t>
+            </a:r>
+            <a:r>
+              <a:rPr lang="en-US" altLang="en-US" sz="1300">
+                <a:latin typeface="Arial" panose="020B0604020202020204" pitchFamily="34" charset="0"/>
+              </a:rPr>
+              <a:t> olaraq </a:t>
+            </a:r>
+            <a:r>
+              <a:rPr lang="en-US" altLang="en-US" sz="1300" b="1">
+                <a:solidFill>
+                  <a:srgbClr val="FF0000"/>
+                </a:solidFill>
+                <a:latin typeface="Arial" panose="020B0604020202020204" pitchFamily="34" charset="0"/>
+              </a:rPr>
+              <a:t>Category</a:t>
+            </a:r>
+            <a:r>
+              <a:rPr lang="en-US" altLang="en-US" sz="1300">
+                <a:latin typeface="Arial" panose="020B0604020202020204" pitchFamily="34" charset="0"/>
+              </a:rPr>
+              <a:t> </a:t>
+            </a:r>
+            <a:r>
+              <a:rPr lang="az-Latn-AZ" altLang="en-US" sz="1300">
+                <a:latin typeface="Arial" panose="020B0604020202020204" pitchFamily="34" charset="0"/>
+              </a:rPr>
+              <a:t>modelinə </a:t>
+            </a:r>
+            <a:r>
+              <a:rPr lang="az-Latn-AZ" altLang="en-US" sz="1300" b="1">
+                <a:solidFill>
+                  <a:srgbClr val="00B050"/>
+                </a:solidFill>
+                <a:latin typeface="Arial" panose="020B0604020202020204" pitchFamily="34" charset="0"/>
+              </a:rPr>
+              <a:t>data</a:t>
+            </a:r>
+            <a:r>
+              <a:rPr lang="az-Latn-AZ" altLang="en-US" sz="1300">
+                <a:latin typeface="Arial" panose="020B0604020202020204" pitchFamily="34" charset="0"/>
+              </a:rPr>
+              <a:t> əlavə edirik. </a:t>
+            </a:r>
+            <a:endParaRPr kumimoji="0" lang="en-US" altLang="en-US" sz="1300" b="0" i="0" u="none" strike="noStrike" cap="none" normalizeH="0" baseline="0">
+              <a:ln>
+                <a:noFill/>
+              </a:ln>
+              <a:solidFill>
+                <a:schemeClr val="tx1"/>
+              </a:solidFill>
+              <a:effectLst/>
+              <a:latin typeface="Arial" panose="020B0604020202020204" pitchFamily="34" charset="0"/>
+            </a:endParaRPr>
+          </a:p>
+        </p:txBody>
+      </p:sp>
+      <p:pic>
+        <p:nvPicPr>
+          <p:cNvPr id="4" name="Picture 3">
+            <a:extLst>
+              <a:ext uri="{FF2B5EF4-FFF2-40B4-BE49-F238E27FC236}">
+                <a16:creationId xmlns:a16="http://schemas.microsoft.com/office/drawing/2014/main" id="{E7FF875C-A692-7DF8-0C25-AA7907405932}"/>
+              </a:ext>
+            </a:extLst>
+          </p:cNvPr>
+          <p:cNvPicPr>
+            <a:picLocks noChangeAspect="1"/>
+          </p:cNvPicPr>
+          <p:nvPr/>
+        </p:nvPicPr>
+        <p:blipFill>
+          <a:blip r:embed="rId2"/>
+          <a:stretch>
+            <a:fillRect/>
+          </a:stretch>
+        </p:blipFill>
+        <p:spPr>
+          <a:xfrm>
+            <a:off x="146664" y="2302974"/>
+            <a:ext cx="8316486" cy="4420217"/>
+          </a:xfrm>
+          <a:prstGeom prst="rect">
+            <a:avLst/>
+          </a:prstGeom>
+          <a:ln w="38100" cap="sq">
+            <a:solidFill>
+              <a:srgbClr val="000000"/>
+            </a:solidFill>
+            <a:prstDash val="solid"/>
+            <a:miter lim="800000"/>
+          </a:ln>
+          <a:effectLst>
+            <a:outerShdw blurRad="50800" dist="38100" dir="2700000" algn="tl" rotWithShape="0">
+              <a:srgbClr val="000000">
+                <a:alpha val="43000"/>
+              </a:srgbClr>
+            </a:outerShdw>
+          </a:effectLst>
+        </p:spPr>
+      </p:pic>
     </p:spTree>
     <p:extLst>
       <p:ext uri="{BB962C8B-B14F-4D97-AF65-F5344CB8AC3E}">
@@ -3436,7 +3534,7 @@
         <p:spPr>
           <a:xfrm>
             <a:off x="217714" y="255046"/>
-            <a:ext cx="11756571" cy="355354"/>
+            <a:ext cx="11756571" cy="1855764"/>
           </a:xfrm>
           <a:prstGeom prst="rect">
             <a:avLst/>
@@ -3456,21 +3554,241 @@
               <a:buNone/>
             </a:pPr>
             <a:r>
-              <a:rPr kumimoji="0" lang="en-US" altLang="en-US" sz="1300" b="0" i="0" u="none" strike="noStrike" cap="none" normalizeH="0" baseline="0">
-                <a:ln>
-                  <a:noFill/>
-                </a:ln>
-                <a:solidFill>
-                  <a:schemeClr val="tx1"/>
-                </a:solidFill>
-                <a:effectLst/>
+              <a:rPr lang="en-US" altLang="en-US" sz="1300">
                 <a:latin typeface="Arial" panose="020B0604020202020204" pitchFamily="34" charset="0"/>
               </a:rPr>
-              <a:t>.</a:t>
-            </a:r>
-          </a:p>
-        </p:txBody>
-      </p:sp>
+              <a:t>Sonra </a:t>
+            </a:r>
+            <a:r>
+              <a:rPr lang="az-Latn-AZ" altLang="en-US" sz="1300" b="1">
+                <a:latin typeface="Arial" panose="020B0604020202020204" pitchFamily="34" charset="0"/>
+              </a:rPr>
+              <a:t>Category</a:t>
+            </a:r>
+            <a:r>
+              <a:rPr lang="en-US" altLang="en-US" sz="1300">
+                <a:latin typeface="Arial" panose="020B0604020202020204" pitchFamily="34" charset="0"/>
+              </a:rPr>
+              <a:t> modelini </a:t>
+            </a:r>
+            <a:r>
+              <a:rPr lang="en-US" altLang="en-US" sz="1300" b="1">
+                <a:latin typeface="Arial" panose="020B0604020202020204" pitchFamily="34" charset="0"/>
+              </a:rPr>
+              <a:t>PostController</a:t>
+            </a:r>
+            <a:r>
+              <a:rPr lang="en-US" altLang="en-US" sz="1300">
+                <a:latin typeface="Arial" panose="020B0604020202020204" pitchFamily="34" charset="0"/>
+              </a:rPr>
+              <a:t> -</a:t>
+            </a:r>
+            <a:r>
+              <a:rPr lang="az-Latn-AZ" altLang="en-US" sz="1300">
+                <a:latin typeface="Arial" panose="020B0604020202020204" pitchFamily="34" charset="0"/>
+              </a:rPr>
+              <a:t>də çağıraraq, dataları </a:t>
+            </a:r>
+            <a:r>
+              <a:rPr lang="en-US" altLang="en-US" sz="1300" b="1">
+                <a:latin typeface="Arial" panose="020B0604020202020204" pitchFamily="34" charset="0"/>
+              </a:rPr>
+              <a:t>create.blade.php </a:t>
+            </a:r>
+            <a:r>
+              <a:rPr lang="az-Latn-AZ" altLang="en-US" sz="1300">
+                <a:latin typeface="Arial" panose="020B0604020202020204" pitchFamily="34" charset="0"/>
+              </a:rPr>
+              <a:t>şablonuna göndəririk.</a:t>
+            </a:r>
+          </a:p>
+          <a:p>
+            <a:pPr>
+              <a:lnSpc>
+                <a:spcPct val="150000"/>
+              </a:lnSpc>
+              <a:buNone/>
+            </a:pPr>
+            <a:endParaRPr kumimoji="0" lang="az-Latn-AZ" altLang="en-US" sz="1300" b="0" i="0" u="none" strike="noStrike" cap="none" normalizeH="0" baseline="0">
+              <a:ln>
+                <a:noFill/>
+              </a:ln>
+              <a:solidFill>
+                <a:schemeClr val="tx1"/>
+              </a:solidFill>
+              <a:effectLst/>
+              <a:latin typeface="Arial" panose="020B0604020202020204" pitchFamily="34" charset="0"/>
+            </a:endParaRPr>
+          </a:p>
+          <a:p>
+            <a:pPr>
+              <a:lnSpc>
+                <a:spcPct val="150000"/>
+              </a:lnSpc>
+              <a:buNone/>
+            </a:pPr>
+            <a:r>
+              <a:rPr lang="az-Latn-AZ" altLang="en-US" sz="1300">
+                <a:latin typeface="Arial" panose="020B0604020202020204" pitchFamily="34" charset="0"/>
+              </a:rPr>
+              <a:t>Həmdə </a:t>
+            </a:r>
+            <a:r>
+              <a:rPr lang="az-Latn-AZ" altLang="en-US" sz="1300" b="1">
+                <a:latin typeface="Arial" panose="020B0604020202020204" pitchFamily="34" charset="0"/>
+              </a:rPr>
+              <a:t>create.blade.php </a:t>
+            </a:r>
+            <a:r>
+              <a:rPr lang="az-Latn-AZ" altLang="en-US" sz="1300">
+                <a:latin typeface="Arial" panose="020B0604020202020204" pitchFamily="34" charset="0"/>
+              </a:rPr>
+              <a:t>şablonunda, sonrakı addım üçün </a:t>
+            </a:r>
+            <a:r>
+              <a:rPr lang="az-Latn-AZ" altLang="en-US" sz="1300" b="1">
+                <a:solidFill>
+                  <a:srgbClr val="00B050"/>
+                </a:solidFill>
+                <a:latin typeface="Arial" panose="020B0604020202020204" pitchFamily="34" charset="0"/>
+              </a:rPr>
+              <a:t>inputa</a:t>
+            </a:r>
+            <a:r>
+              <a:rPr lang="az-Latn-AZ" altLang="en-US" sz="1300">
+                <a:latin typeface="Arial" panose="020B0604020202020204" pitchFamily="34" charset="0"/>
+              </a:rPr>
+              <a:t> yazılan dəyərləri </a:t>
+            </a:r>
+            <a:r>
+              <a:rPr lang="az-Latn-AZ" altLang="en-US" sz="1300" b="1">
+                <a:solidFill>
+                  <a:srgbClr val="0070C0"/>
+                </a:solidFill>
+                <a:latin typeface="Arial" panose="020B0604020202020204" pitchFamily="34" charset="0"/>
+              </a:rPr>
+              <a:t>post</a:t>
+            </a:r>
+            <a:r>
+              <a:rPr lang="az-Latn-AZ" altLang="en-US" sz="1300">
+                <a:latin typeface="Arial" panose="020B0604020202020204" pitchFamily="34" charset="0"/>
+              </a:rPr>
+              <a:t> cədvəlinə əlavə etmək üçün həmin </a:t>
+            </a:r>
+            <a:r>
+              <a:rPr lang="az-Latn-AZ" altLang="en-US" sz="1300" b="1">
+                <a:latin typeface="Arial" panose="020B0604020202020204" pitchFamily="34" charset="0"/>
+              </a:rPr>
+              <a:t>input</a:t>
+            </a:r>
+            <a:r>
+              <a:rPr lang="az-Latn-AZ" altLang="en-US" sz="1300">
+                <a:latin typeface="Arial" panose="020B0604020202020204" pitchFamily="34" charset="0"/>
+              </a:rPr>
+              <a:t> tag-lərinə </a:t>
+            </a:r>
+            <a:r>
+              <a:rPr lang="az-Latn-AZ" altLang="en-US" sz="1300" b="1">
+                <a:solidFill>
+                  <a:srgbClr val="FF0000"/>
+                </a:solidFill>
+                <a:latin typeface="Arial" panose="020B0604020202020204" pitchFamily="34" charset="0"/>
+              </a:rPr>
+              <a:t>name</a:t>
+            </a:r>
+            <a:r>
+              <a:rPr lang="az-Latn-AZ" altLang="en-US" sz="1300">
+                <a:latin typeface="Arial" panose="020B0604020202020204" pitchFamily="34" charset="0"/>
+              </a:rPr>
+              <a:t> atributlarını yazırıq.</a:t>
+            </a:r>
+          </a:p>
+          <a:p>
+            <a:pPr>
+              <a:lnSpc>
+                <a:spcPct val="150000"/>
+              </a:lnSpc>
+              <a:buNone/>
+            </a:pPr>
+            <a:endParaRPr kumimoji="0" lang="az-Latn-AZ" altLang="en-US" sz="1300" b="0" i="0" u="none" strike="noStrike" cap="none" normalizeH="0" baseline="0">
+              <a:ln>
+                <a:noFill/>
+              </a:ln>
+              <a:solidFill>
+                <a:schemeClr val="tx1"/>
+              </a:solidFill>
+              <a:effectLst/>
+              <a:latin typeface="Arial" panose="020B0604020202020204" pitchFamily="34" charset="0"/>
+            </a:endParaRPr>
+          </a:p>
+          <a:p>
+            <a:pPr>
+              <a:lnSpc>
+                <a:spcPct val="150000"/>
+              </a:lnSpc>
+              <a:buNone/>
+            </a:pPr>
+            <a:r>
+              <a:rPr lang="en-US" altLang="en-US" sz="1300" b="1">
+                <a:latin typeface="Arial" panose="020B0604020202020204" pitchFamily="34" charset="0"/>
+              </a:rPr>
+              <a:t>@csrf </a:t>
+            </a:r>
+            <a:r>
+              <a:rPr lang="az-Latn-AZ" altLang="en-US" sz="1300">
+                <a:latin typeface="Arial" panose="020B0604020202020204" pitchFamily="34" charset="0"/>
+              </a:rPr>
+              <a:t>tokeninidə əlavə etməyi unutmayın.</a:t>
+            </a:r>
+            <a:endParaRPr kumimoji="0" lang="en-US" altLang="en-US" sz="1300" b="0" i="0" u="none" strike="noStrike" cap="none" normalizeH="0" baseline="0">
+              <a:ln>
+                <a:noFill/>
+              </a:ln>
+              <a:solidFill>
+                <a:schemeClr val="tx1"/>
+              </a:solidFill>
+              <a:effectLst/>
+              <a:latin typeface="Arial" panose="020B0604020202020204" pitchFamily="34" charset="0"/>
+            </a:endParaRPr>
+          </a:p>
+        </p:txBody>
+      </p:sp>
+      <p:pic>
+        <p:nvPicPr>
+          <p:cNvPr id="4" name="Picture 3">
+            <a:extLst>
+              <a:ext uri="{FF2B5EF4-FFF2-40B4-BE49-F238E27FC236}">
+                <a16:creationId xmlns:a16="http://schemas.microsoft.com/office/drawing/2014/main" id="{998DD76D-8AEE-03BC-3174-333402A2ADF3}"/>
+              </a:ext>
+            </a:extLst>
+          </p:cNvPr>
+          <p:cNvPicPr>
+            <a:picLocks noChangeAspect="1"/>
+          </p:cNvPicPr>
+          <p:nvPr/>
+        </p:nvPicPr>
+        <p:blipFill>
+          <a:blip r:embed="rId2">
+            <a:extLst>
+              <a:ext uri="{28A0092B-C50C-407E-A947-70E740481C1C}">
+                <a14:useLocalDpi xmlns:a14="http://schemas.microsoft.com/office/drawing/2010/main" val="0"/>
+              </a:ext>
+            </a:extLst>
+          </a:blip>
+          <a:stretch>
+            <a:fillRect/>
+          </a:stretch>
+        </p:blipFill>
+        <p:spPr>
+          <a:xfrm>
+            <a:off x="4440025" y="1892448"/>
+            <a:ext cx="7751975" cy="4965551"/>
+          </a:xfrm>
+          <a:prstGeom prst="rect">
+            <a:avLst/>
+          </a:prstGeom>
+        </p:spPr>
+      </p:pic>
     </p:spTree>
     <p:extLst>
       <p:ext uri="{BB962C8B-B14F-4D97-AF65-F5344CB8AC3E}">
@@ -3542,21 +3860,122 @@
               <a:buNone/>
             </a:pPr>
             <a:r>
-              <a:rPr kumimoji="0" lang="en-US" altLang="en-US" sz="1300" b="0" i="0" u="none" strike="noStrike" cap="none" normalizeH="0" baseline="0">
-                <a:ln>
-                  <a:noFill/>
-                </a:ln>
-                <a:solidFill>
-                  <a:schemeClr val="tx1"/>
-                </a:solidFill>
-                <a:effectLst/>
+              <a:rPr lang="en-US" altLang="en-US" sz="1300">
                 <a:latin typeface="Arial" panose="020B0604020202020204" pitchFamily="34" charset="0"/>
               </a:rPr>
-              <a:t>.</a:t>
-            </a:r>
-          </a:p>
-        </p:txBody>
-      </p:sp>
+              <a:t>Sonra </a:t>
+            </a:r>
+            <a:r>
+              <a:rPr lang="en-US" altLang="en-US" sz="1300" b="1">
+                <a:latin typeface="Arial" panose="020B0604020202020204" pitchFamily="34" charset="0"/>
+              </a:rPr>
+              <a:t>Validasiya</a:t>
+            </a:r>
+            <a:r>
+              <a:rPr lang="en-US" altLang="en-US" sz="1300">
+                <a:latin typeface="Arial" panose="020B0604020202020204" pitchFamily="34" charset="0"/>
+              </a:rPr>
+              <a:t> </a:t>
+            </a:r>
+            <a:r>
+              <a:rPr lang="az-Latn-AZ" altLang="en-US" sz="1300">
+                <a:latin typeface="Arial" panose="020B0604020202020204" pitchFamily="34" charset="0"/>
+              </a:rPr>
+              <a:t>əlavə edərək proqramı test edirik.</a:t>
+            </a:r>
+            <a:endParaRPr kumimoji="0" lang="en-US" altLang="en-US" sz="1300" b="0" i="0" u="none" strike="noStrike" cap="none" normalizeH="0" baseline="0">
+              <a:ln>
+                <a:noFill/>
+              </a:ln>
+              <a:solidFill>
+                <a:schemeClr val="tx1"/>
+              </a:solidFill>
+              <a:effectLst/>
+              <a:latin typeface="Arial" panose="020B0604020202020204" pitchFamily="34" charset="0"/>
+            </a:endParaRPr>
+          </a:p>
+        </p:txBody>
+      </p:sp>
+      <p:pic>
+        <p:nvPicPr>
+          <p:cNvPr id="4" name="Picture 3">
+            <a:extLst>
+              <a:ext uri="{FF2B5EF4-FFF2-40B4-BE49-F238E27FC236}">
+                <a16:creationId xmlns:a16="http://schemas.microsoft.com/office/drawing/2014/main" id="{B73D748B-F90D-EFA7-62A2-BC62A2394E07}"/>
+              </a:ext>
+            </a:extLst>
+          </p:cNvPr>
+          <p:cNvPicPr>
+            <a:picLocks noChangeAspect="1"/>
+          </p:cNvPicPr>
+          <p:nvPr/>
+        </p:nvPicPr>
+        <p:blipFill>
+          <a:blip r:embed="rId2">
+            <a:extLst>
+              <a:ext uri="{28A0092B-C50C-407E-A947-70E740481C1C}">
+                <a14:useLocalDpi xmlns:a14="http://schemas.microsoft.com/office/drawing/2010/main" val="0"/>
+              </a:ext>
+            </a:extLst>
+          </a:blip>
+          <a:stretch>
+            <a:fillRect/>
+          </a:stretch>
+        </p:blipFill>
+        <p:spPr>
+          <a:xfrm>
+            <a:off x="2743200" y="1789333"/>
+            <a:ext cx="9448800" cy="5068667"/>
+          </a:xfrm>
+          <a:prstGeom prst="rect">
+            <a:avLst/>
+          </a:prstGeom>
+        </p:spPr>
+      </p:pic>
+      <p:pic>
+        <p:nvPicPr>
+          <p:cNvPr id="6" name="Picture 5">
+            <a:extLst>
+              <a:ext uri="{FF2B5EF4-FFF2-40B4-BE49-F238E27FC236}">
+                <a16:creationId xmlns:a16="http://schemas.microsoft.com/office/drawing/2014/main" id="{025C5C6B-9642-B228-204C-CD0A6A96F9DD}"/>
+              </a:ext>
+            </a:extLst>
+          </p:cNvPr>
+          <p:cNvPicPr>
+            <a:picLocks noChangeAspect="1"/>
+          </p:cNvPicPr>
+          <p:nvPr/>
+        </p:nvPicPr>
+        <p:blipFill>
+          <a:blip r:embed="rId3"/>
+          <a:stretch>
+            <a:fillRect/>
+          </a:stretch>
+        </p:blipFill>
+        <p:spPr>
+          <a:xfrm>
+            <a:off x="7371677" y="0"/>
+            <a:ext cx="4820323" cy="1305107"/>
+          </a:xfrm>
+          <a:prstGeom prst="rect">
+            <a:avLst/>
+          </a:prstGeom>
+          <a:ln w="38100" cap="sq">
+            <a:solidFill>
+              <a:srgbClr val="000000"/>
+            </a:solidFill>
+            <a:prstDash val="solid"/>
+            <a:miter lim="800000"/>
+          </a:ln>
+          <a:effectLst>
+            <a:outerShdw blurRad="50800" dist="38100" dir="2700000" algn="tl" rotWithShape="0">
+              <a:srgbClr val="000000">
+                <a:alpha val="43000"/>
+              </a:srgbClr>
+            </a:outerShdw>
+          </a:effectLst>
+        </p:spPr>
+      </p:pic>
     </p:spTree>
     <p:extLst>
       <p:ext uri="{BB962C8B-B14F-4D97-AF65-F5344CB8AC3E}">
@@ -3571,6 +3990,264 @@
 </file>
 
 <file path=ppt/slides/slide4.xml><?xml version="1.0" encoding="utf-8"?>
+<p:sld xmlns:a="http://schemas.openxmlformats.org/drawingml/2006/main" xmlns:r="http://schemas.openxmlformats.org/officeDocument/2006/relationships" xmlns:p="http://schemas.openxmlformats.org/presentationml/2006/main">
+  <p:cSld>
+    <p:spTree>
+      <p:nvGrpSpPr>
+        <p:cNvPr id="1" name="">
+          <a:extLst>
+            <a:ext uri="{FF2B5EF4-FFF2-40B4-BE49-F238E27FC236}">
+              <a16:creationId xmlns:a16="http://schemas.microsoft.com/office/drawing/2014/main" id="{DF774EAC-8124-39E2-699F-61800A2323F8}"/>
+            </a:ext>
+          </a:extLst>
+        </p:cNvPr>
+        <p:cNvGrpSpPr/>
+        <p:nvPr/>
+      </p:nvGrpSpPr>
+      <p:grpSpPr>
+        <a:xfrm>
+          <a:off x="0" y="0"/>
+          <a:ext cx="0" cy="0"/>
+          <a:chOff x="0" y="0"/>
+          <a:chExt cx="0" cy="0"/>
+        </a:xfrm>
+      </p:grpSpPr>
+      <p:sp>
+        <p:nvSpPr>
+          <p:cNvPr id="3" name="TextBox 2">
+            <a:extLst>
+              <a:ext uri="{FF2B5EF4-FFF2-40B4-BE49-F238E27FC236}">
+                <a16:creationId xmlns:a16="http://schemas.microsoft.com/office/drawing/2014/main" id="{37C7A3C2-BC5B-956E-D52B-FB251B3A11FC}"/>
+              </a:ext>
+            </a:extLst>
+          </p:cNvPr>
+          <p:cNvSpPr txBox="1"/>
+          <p:nvPr/>
+        </p:nvSpPr>
+        <p:spPr>
+          <a:xfrm>
+            <a:off x="217714" y="255046"/>
+            <a:ext cx="11756571" cy="355354"/>
+          </a:xfrm>
+          <a:prstGeom prst="rect">
+            <a:avLst/>
+          </a:prstGeom>
+          <a:noFill/>
+        </p:spPr>
+        <p:txBody>
+          <a:bodyPr wrap="square">
+            <a:spAutoFit/>
+          </a:bodyPr>
+          <a:lstStyle/>
+          <a:p>
+            <a:pPr>
+              <a:lnSpc>
+                <a:spcPct val="150000"/>
+              </a:lnSpc>
+              <a:buNone/>
+            </a:pPr>
+            <a:r>
+              <a:rPr kumimoji="0" lang="en-US" altLang="en-US" sz="1300" b="0" i="0" u="none" strike="noStrike" cap="none" normalizeH="0" baseline="0">
+                <a:ln>
+                  <a:noFill/>
+                </a:ln>
+                <a:solidFill>
+                  <a:schemeClr val="tx1"/>
+                </a:solidFill>
+                <a:effectLst/>
+                <a:latin typeface="Arial" panose="020B0604020202020204" pitchFamily="34" charset="0"/>
+              </a:rPr>
+              <a:t>.</a:t>
+            </a:r>
+          </a:p>
+        </p:txBody>
+      </p:sp>
+    </p:spTree>
+    <p:extLst>
+      <p:ext uri="{BB962C8B-B14F-4D97-AF65-F5344CB8AC3E}">
+        <p14:creationId xmlns:p14="http://schemas.microsoft.com/office/powerpoint/2010/main" val="3745133674"/>
+      </p:ext>
+    </p:extLst>
+  </p:cSld>
+  <p:clrMapOvr>
+    <a:masterClrMapping/>
+  </p:clrMapOvr>
+</p:sld>
+</file>
+
+<file path=ppt/slides/slide5.xml><?xml version="1.0" encoding="utf-8"?>
+<p:sld xmlns:a="http://schemas.openxmlformats.org/drawingml/2006/main" xmlns:r="http://schemas.openxmlformats.org/officeDocument/2006/relationships" xmlns:p="http://schemas.openxmlformats.org/presentationml/2006/main">
+  <p:cSld>
+    <p:spTree>
+      <p:nvGrpSpPr>
+        <p:cNvPr id="1" name="">
+          <a:extLst>
+            <a:ext uri="{FF2B5EF4-FFF2-40B4-BE49-F238E27FC236}">
+              <a16:creationId xmlns:a16="http://schemas.microsoft.com/office/drawing/2014/main" id="{2E0B4831-76B9-E1B2-8652-416DA24C6CF9}"/>
+            </a:ext>
+          </a:extLst>
+        </p:cNvPr>
+        <p:cNvGrpSpPr/>
+        <p:nvPr/>
+      </p:nvGrpSpPr>
+      <p:grpSpPr>
+        <a:xfrm>
+          <a:off x="0" y="0"/>
+          <a:ext cx="0" cy="0"/>
+          <a:chOff x="0" y="0"/>
+          <a:chExt cx="0" cy="0"/>
+        </a:xfrm>
+      </p:grpSpPr>
+      <p:sp>
+        <p:nvSpPr>
+          <p:cNvPr id="3" name="TextBox 2">
+            <a:extLst>
+              <a:ext uri="{FF2B5EF4-FFF2-40B4-BE49-F238E27FC236}">
+                <a16:creationId xmlns:a16="http://schemas.microsoft.com/office/drawing/2014/main" id="{213F9D71-6674-6E86-8B70-224C0E60B9F8}"/>
+              </a:ext>
+            </a:extLst>
+          </p:cNvPr>
+          <p:cNvSpPr txBox="1"/>
+          <p:nvPr/>
+        </p:nvSpPr>
+        <p:spPr>
+          <a:xfrm>
+            <a:off x="217714" y="255046"/>
+            <a:ext cx="11756571" cy="355354"/>
+          </a:xfrm>
+          <a:prstGeom prst="rect">
+            <a:avLst/>
+          </a:prstGeom>
+          <a:noFill/>
+        </p:spPr>
+        <p:txBody>
+          <a:bodyPr wrap="square">
+            <a:spAutoFit/>
+          </a:bodyPr>
+          <a:lstStyle/>
+          <a:p>
+            <a:pPr>
+              <a:lnSpc>
+                <a:spcPct val="150000"/>
+              </a:lnSpc>
+              <a:buNone/>
+            </a:pPr>
+            <a:r>
+              <a:rPr kumimoji="0" lang="en-US" altLang="en-US" sz="1300" b="0" i="0" u="none" strike="noStrike" cap="none" normalizeH="0" baseline="0">
+                <a:ln>
+                  <a:noFill/>
+                </a:ln>
+                <a:solidFill>
+                  <a:schemeClr val="tx1"/>
+                </a:solidFill>
+                <a:effectLst/>
+                <a:latin typeface="Arial" panose="020B0604020202020204" pitchFamily="34" charset="0"/>
+              </a:rPr>
+              <a:t>.</a:t>
+            </a:r>
+          </a:p>
+        </p:txBody>
+      </p:sp>
+    </p:spTree>
+    <p:extLst>
+      <p:ext uri="{BB962C8B-B14F-4D97-AF65-F5344CB8AC3E}">
+        <p14:creationId xmlns:p14="http://schemas.microsoft.com/office/powerpoint/2010/main" val="627344348"/>
+      </p:ext>
+    </p:extLst>
+  </p:cSld>
+  <p:clrMapOvr>
+    <a:masterClrMapping/>
+  </p:clrMapOvr>
+</p:sld>
+</file>
+
+<file path=ppt/slides/slide6.xml><?xml version="1.0" encoding="utf-8"?>
+<p:sld xmlns:a="http://schemas.openxmlformats.org/drawingml/2006/main" xmlns:r="http://schemas.openxmlformats.org/officeDocument/2006/relationships" xmlns:p="http://schemas.openxmlformats.org/presentationml/2006/main">
+  <p:cSld>
+    <p:spTree>
+      <p:nvGrpSpPr>
+        <p:cNvPr id="1" name="">
+          <a:extLst>
+            <a:ext uri="{FF2B5EF4-FFF2-40B4-BE49-F238E27FC236}">
+              <a16:creationId xmlns:a16="http://schemas.microsoft.com/office/drawing/2014/main" id="{2D50C8A0-3AC2-7082-BED5-CC1DDFB40EEF}"/>
+            </a:ext>
+          </a:extLst>
+        </p:cNvPr>
+        <p:cNvGrpSpPr/>
+        <p:nvPr/>
+      </p:nvGrpSpPr>
+      <p:grpSpPr>
+        <a:xfrm>
+          <a:off x="0" y="0"/>
+          <a:ext cx="0" cy="0"/>
+          <a:chOff x="0" y="0"/>
+          <a:chExt cx="0" cy="0"/>
+        </a:xfrm>
+      </p:grpSpPr>
+      <p:sp>
+        <p:nvSpPr>
+          <p:cNvPr id="3" name="TextBox 2">
+            <a:extLst>
+              <a:ext uri="{FF2B5EF4-FFF2-40B4-BE49-F238E27FC236}">
+                <a16:creationId xmlns:a16="http://schemas.microsoft.com/office/drawing/2014/main" id="{EF977525-D1D2-11D1-5034-B0E7B336678C}"/>
+              </a:ext>
+            </a:extLst>
+          </p:cNvPr>
+          <p:cNvSpPr txBox="1"/>
+          <p:nvPr/>
+        </p:nvSpPr>
+        <p:spPr>
+          <a:xfrm>
+            <a:off x="217714" y="255046"/>
+            <a:ext cx="11756571" cy="355354"/>
+          </a:xfrm>
+          <a:prstGeom prst="rect">
+            <a:avLst/>
+          </a:prstGeom>
+          <a:noFill/>
+        </p:spPr>
+        <p:txBody>
+          <a:bodyPr wrap="square">
+            <a:spAutoFit/>
+          </a:bodyPr>
+          <a:lstStyle/>
+          <a:p>
+            <a:pPr>
+              <a:lnSpc>
+                <a:spcPct val="150000"/>
+              </a:lnSpc>
+              <a:buNone/>
+            </a:pPr>
+            <a:r>
+              <a:rPr kumimoji="0" lang="en-US" altLang="en-US" sz="1300" b="0" i="0" u="none" strike="noStrike" cap="none" normalizeH="0" baseline="0">
+                <a:ln>
+                  <a:noFill/>
+                </a:ln>
+                <a:solidFill>
+                  <a:schemeClr val="tx1"/>
+                </a:solidFill>
+                <a:effectLst/>
+                <a:latin typeface="Arial" panose="020B0604020202020204" pitchFamily="34" charset="0"/>
+              </a:rPr>
+              <a:t>.</a:t>
+            </a:r>
+          </a:p>
+        </p:txBody>
+      </p:sp>
+    </p:spTree>
+    <p:extLst>
+      <p:ext uri="{BB962C8B-B14F-4D97-AF65-F5344CB8AC3E}">
+        <p14:creationId xmlns:p14="http://schemas.microsoft.com/office/powerpoint/2010/main" val="2011641466"/>
+      </p:ext>
+    </p:extLst>
+  </p:cSld>
+  <p:clrMapOvr>
+    <a:masterClrMapping/>
+  </p:clrMapOvr>
+</p:sld>
+</file>
+
+<file path=ppt/slides/slide7.xml><?xml version="1.0" encoding="utf-8"?>
 <p:sld xmlns:a="http://schemas.openxmlformats.org/drawingml/2006/main" xmlns:r="http://schemas.openxmlformats.org/officeDocument/2006/relationships" xmlns:p="http://schemas.openxmlformats.org/presentationml/2006/main">
   <p:cSld>
     <p:spTree>
